--- a/phuse-admiral-roclets-pres-ppt.pptx
+++ b/phuse-admiral-roclets-pres-ppt.pptx
@@ -3280,186 +3280,6 @@
       </p:sp>
     </p:spTree>
   </p:cSld>
-  <p:timing>
-    <p:tnLst>
-      <p:par>
-        <p:cTn id="1" dur="indefinite" restart="never" nodeType="tmRoot">
-          <p:childTnLst>
-            <p:seq concurrent="1" nextAc="seek">
-              <p:cTn id="2" dur="indefinite" nodeType="mainSeq">
-                <p:childTnLst>
-                  <p:par>
-                    <p:cTn id="3" fill="hold">
-                      <p:stCondLst>
-                        <p:cond delay="indefinite"/>
-                      </p:stCondLst>
-                      <p:childTnLst>
-                        <p:par>
-                          <p:cTn id="4" fill="hold">
-                            <p:stCondLst>
-                              <p:cond delay="0"/>
-                            </p:stCondLst>
-                            <p:childTnLst>
-                              <p:par>
-                                <p:cTn id="5" presetID="1" presetClass="entr" presetSubtype="0" fill="hold" grpId="0" nodeType="clickEffect">
-                                  <p:stCondLst>
-                                    <p:cond delay="0"/>
-                                  </p:stCondLst>
-                                  <p:childTnLst>
-                                    <p:set>
-                                      <p:cBhvr>
-                                        <p:cTn id="6" dur="1" fill="hold">
-                                          <p:stCondLst>
-                                            <p:cond delay="0"/>
-                                          </p:stCondLst>
-                                        </p:cTn>
-                                        <p:tgtEl>
-                                          <p:spTgt spid="4">
-                                            <p:txEl>
-                                              <p:pRg st="0" end="0"/>
-                                            </p:txEl>
-                                          </p:spTgt>
-                                        </p:tgtEl>
-                                        <p:attrNameLst>
-                                          <p:attrName>style.visibility</p:attrName>
-                                        </p:attrNameLst>
-                                      </p:cBhvr>
-                                      <p:to>
-                                        <p:strVal val="visible"/>
-                                      </p:to>
-                                    </p:set>
-                                  </p:childTnLst>
-                                </p:cTn>
-                              </p:par>
-                            </p:childTnLst>
-                          </p:cTn>
-                        </p:par>
-                      </p:childTnLst>
-                    </p:cTn>
-                  </p:par>
-                  <p:par>
-                    <p:cTn id="7" fill="hold">
-                      <p:stCondLst>
-                        <p:cond delay="indefinite"/>
-                      </p:stCondLst>
-                      <p:childTnLst>
-                        <p:par>
-                          <p:cTn id="8" fill="hold">
-                            <p:stCondLst>
-                              <p:cond delay="0"/>
-                            </p:stCondLst>
-                            <p:childTnLst>
-                              <p:par>
-                                <p:cTn id="9" presetID="1" presetClass="entr" presetSubtype="0" fill="hold" grpId="0" nodeType="clickEffect">
-                                  <p:stCondLst>
-                                    <p:cond delay="0"/>
-                                  </p:stCondLst>
-                                  <p:childTnLst>
-                                    <p:set>
-                                      <p:cBhvr>
-                                        <p:cTn id="10" dur="1" fill="hold">
-                                          <p:stCondLst>
-                                            <p:cond delay="0"/>
-                                          </p:stCondLst>
-                                        </p:cTn>
-                                        <p:tgtEl>
-                                          <p:spTgt spid="4">
-                                            <p:txEl>
-                                              <p:pRg st="1" end="1"/>
-                                            </p:txEl>
-                                          </p:spTgt>
-                                        </p:tgtEl>
-                                        <p:attrNameLst>
-                                          <p:attrName>style.visibility</p:attrName>
-                                        </p:attrNameLst>
-                                      </p:cBhvr>
-                                      <p:to>
-                                        <p:strVal val="visible"/>
-                                      </p:to>
-                                    </p:set>
-                                  </p:childTnLst>
-                                </p:cTn>
-                              </p:par>
-                            </p:childTnLst>
-                          </p:cTn>
-                        </p:par>
-                      </p:childTnLst>
-                    </p:cTn>
-                  </p:par>
-                  <p:par>
-                    <p:cTn id="11" fill="hold">
-                      <p:stCondLst>
-                        <p:cond delay="indefinite"/>
-                      </p:stCondLst>
-                      <p:childTnLst>
-                        <p:par>
-                          <p:cTn id="12" fill="hold">
-                            <p:stCondLst>
-                              <p:cond delay="0"/>
-                            </p:stCondLst>
-                            <p:childTnLst>
-                              <p:par>
-                                <p:cTn id="13" presetID="1" presetClass="entr" presetSubtype="0" fill="hold" grpId="0" nodeType="clickEffect">
-                                  <p:stCondLst>
-                                    <p:cond delay="0"/>
-                                  </p:stCondLst>
-                                  <p:childTnLst>
-                                    <p:set>
-                                      <p:cBhvr>
-                                        <p:cTn id="14" dur="1" fill="hold">
-                                          <p:stCondLst>
-                                            <p:cond delay="0"/>
-                                          </p:stCondLst>
-                                        </p:cTn>
-                                        <p:tgtEl>
-                                          <p:spTgt spid="4">
-                                            <p:txEl>
-                                              <p:pRg st="2" end="2"/>
-                                            </p:txEl>
-                                          </p:spTgt>
-                                        </p:tgtEl>
-                                        <p:attrNameLst>
-                                          <p:attrName>style.visibility</p:attrName>
-                                        </p:attrNameLst>
-                                      </p:cBhvr>
-                                      <p:to>
-                                        <p:strVal val="visible"/>
-                                      </p:to>
-                                    </p:set>
-                                  </p:childTnLst>
-                                </p:cTn>
-                              </p:par>
-                            </p:childTnLst>
-                          </p:cTn>
-                        </p:par>
-                      </p:childTnLst>
-                    </p:cTn>
-                  </p:par>
-                </p:childTnLst>
-              </p:cTn>
-              <p:prevCondLst>
-                <p:cond evt="onPrev" delay="0">
-                  <p:tgtEl>
-                    <p:sldTgt/>
-                  </p:tgtEl>
-                </p:cond>
-              </p:prevCondLst>
-              <p:nextCondLst>
-                <p:cond evt="onNext" delay="0">
-                  <p:tgtEl>
-                    <p:sldTgt/>
-                  </p:tgtEl>
-                </p:cond>
-              </p:nextCondLst>
-            </p:seq>
-          </p:childTnLst>
-        </p:cTn>
-      </p:par>
-    </p:tnLst>
-    <p:bldLst>
-      <p:bldP spid="4" grpId="0" uiExpand="1" build="p"/>
-    </p:bldLst>
-  </p:timing>
 </p:sld>
 </file>
 
@@ -3551,235 +3371,6 @@
       </p:sp>
     </p:spTree>
   </p:cSld>
-  <p:timing>
-    <p:tnLst>
-      <p:par>
-        <p:cTn id="1" dur="indefinite" restart="never" nodeType="tmRoot">
-          <p:childTnLst>
-            <p:seq concurrent="1" nextAc="seek">
-              <p:cTn id="2" dur="indefinite" nodeType="mainSeq">
-                <p:childTnLst>
-                  <p:par>
-                    <p:cTn id="3" fill="hold">
-                      <p:stCondLst>
-                        <p:cond delay="indefinite"/>
-                      </p:stCondLst>
-                      <p:childTnLst>
-                        <p:par>
-                          <p:cTn id="4" fill="hold">
-                            <p:stCondLst>
-                              <p:cond delay="0"/>
-                            </p:stCondLst>
-                            <p:childTnLst>
-                              <p:par>
-                                <p:cTn id="5" presetID="1" presetClass="entr" presetSubtype="0" fill="hold" grpId="0" nodeType="clickEffect">
-                                  <p:stCondLst>
-                                    <p:cond delay="0"/>
-                                  </p:stCondLst>
-                                  <p:childTnLst>
-                                    <p:set>
-                                      <p:cBhvr>
-                                        <p:cTn id="6" dur="1" fill="hold">
-                                          <p:stCondLst>
-                                            <p:cond delay="0"/>
-                                          </p:stCondLst>
-                                        </p:cTn>
-                                        <p:tgtEl>
-                                          <p:spTgt spid="3">
-                                            <p:txEl>
-                                              <p:pRg st="0" end="0"/>
-                                            </p:txEl>
-                                          </p:spTgt>
-                                        </p:tgtEl>
-                                        <p:attrNameLst>
-                                          <p:attrName>style.visibility</p:attrName>
-                                        </p:attrNameLst>
-                                      </p:cBhvr>
-                                      <p:to>
-                                        <p:strVal val="visible"/>
-                                      </p:to>
-                                    </p:set>
-                                  </p:childTnLst>
-                                </p:cTn>
-                              </p:par>
-                            </p:childTnLst>
-                          </p:cTn>
-                        </p:par>
-                      </p:childTnLst>
-                    </p:cTn>
-                  </p:par>
-                  <p:par>
-                    <p:cTn id="7" fill="hold">
-                      <p:stCondLst>
-                        <p:cond delay="indefinite"/>
-                      </p:stCondLst>
-                      <p:childTnLst>
-                        <p:par>
-                          <p:cTn id="8" fill="hold">
-                            <p:stCondLst>
-                              <p:cond delay="0"/>
-                            </p:stCondLst>
-                            <p:childTnLst>
-                              <p:par>
-                                <p:cTn id="9" presetID="1" presetClass="entr" presetSubtype="0" fill="hold" grpId="0" nodeType="clickEffect">
-                                  <p:stCondLst>
-                                    <p:cond delay="0"/>
-                                  </p:stCondLst>
-                                  <p:childTnLst>
-                                    <p:set>
-                                      <p:cBhvr>
-                                        <p:cTn id="10" dur="1" fill="hold">
-                                          <p:stCondLst>
-                                            <p:cond delay="0"/>
-                                          </p:stCondLst>
-                                        </p:cTn>
-                                        <p:tgtEl>
-                                          <p:spTgt spid="3">
-                                            <p:txEl>
-                                              <p:pRg st="1" end="1"/>
-                                            </p:txEl>
-                                          </p:spTgt>
-                                        </p:tgtEl>
-                                        <p:attrNameLst>
-                                          <p:attrName>style.visibility</p:attrName>
-                                        </p:attrNameLst>
-                                      </p:cBhvr>
-                                      <p:to>
-                                        <p:strVal val="visible"/>
-                                      </p:to>
-                                    </p:set>
-                                  </p:childTnLst>
-                                </p:cTn>
-                              </p:par>
-                            </p:childTnLst>
-                          </p:cTn>
-                        </p:par>
-                      </p:childTnLst>
-                    </p:cTn>
-                  </p:par>
-                  <p:par>
-                    <p:cTn id="11" fill="hold">
-                      <p:stCondLst>
-                        <p:cond delay="indefinite"/>
-                      </p:stCondLst>
-                      <p:childTnLst>
-                        <p:par>
-                          <p:cTn id="12" fill="hold">
-                            <p:stCondLst>
-                              <p:cond delay="0"/>
-                            </p:stCondLst>
-                            <p:childTnLst>
-                              <p:par>
-                                <p:cTn id="13" presetID="1" presetClass="entr" presetSubtype="0" fill="hold" grpId="0" nodeType="clickEffect">
-                                  <p:stCondLst>
-                                    <p:cond delay="0"/>
-                                  </p:stCondLst>
-                                  <p:childTnLst>
-                                    <p:set>
-                                      <p:cBhvr>
-                                        <p:cTn id="14" dur="1" fill="hold">
-                                          <p:stCondLst>
-                                            <p:cond delay="0"/>
-                                          </p:stCondLst>
-                                        </p:cTn>
-                                        <p:tgtEl>
-                                          <p:spTgt spid="3">
-                                            <p:txEl>
-                                              <p:pRg st="2" end="2"/>
-                                            </p:txEl>
-                                          </p:spTgt>
-                                        </p:tgtEl>
-                                        <p:attrNameLst>
-                                          <p:attrName>style.visibility</p:attrName>
-                                        </p:attrNameLst>
-                                      </p:cBhvr>
-                                      <p:to>
-                                        <p:strVal val="visible"/>
-                                      </p:to>
-                                    </p:set>
-                                  </p:childTnLst>
-                                </p:cTn>
-                              </p:par>
-                            </p:childTnLst>
-                          </p:cTn>
-                        </p:par>
-                      </p:childTnLst>
-                    </p:cTn>
-                  </p:par>
-                  <p:par>
-                    <p:cTn id="15" fill="hold">
-                      <p:stCondLst>
-                        <p:cond delay="indefinite"/>
-                      </p:stCondLst>
-                      <p:childTnLst>
-                        <p:par>
-                          <p:cTn id="16" fill="hold">
-                            <p:stCondLst>
-                              <p:cond delay="0"/>
-                            </p:stCondLst>
-                            <p:childTnLst>
-                              <p:par>
-                                <p:cTn id="17" presetID="1" presetClass="entr" presetSubtype="0" fill="hold" grpId="0" nodeType="clickEffect">
-                                  <p:stCondLst>
-                                    <p:cond delay="0"/>
-                                  </p:stCondLst>
-                                  <p:childTnLst>
-                                    <p:set>
-                                      <p:cBhvr>
-                                        <p:cTn id="18" dur="1" fill="hold">
-                                          <p:stCondLst>
-                                            <p:cond delay="0"/>
-                                          </p:stCondLst>
-                                        </p:cTn>
-                                        <p:tgtEl>
-                                          <p:spTgt spid="3">
-                                            <p:txEl>
-                                              <p:pRg st="3" end="3"/>
-                                            </p:txEl>
-                                          </p:spTgt>
-                                        </p:tgtEl>
-                                        <p:attrNameLst>
-                                          <p:attrName>style.visibility</p:attrName>
-                                        </p:attrNameLst>
-                                      </p:cBhvr>
-                                      <p:to>
-                                        <p:strVal val="visible"/>
-                                      </p:to>
-                                    </p:set>
-                                  </p:childTnLst>
-                                </p:cTn>
-                              </p:par>
-                            </p:childTnLst>
-                          </p:cTn>
-                        </p:par>
-                      </p:childTnLst>
-                    </p:cTn>
-                  </p:par>
-                </p:childTnLst>
-              </p:cTn>
-              <p:prevCondLst>
-                <p:cond evt="onPrev" delay="0">
-                  <p:tgtEl>
-                    <p:sldTgt/>
-                  </p:tgtEl>
-                </p:cond>
-              </p:prevCondLst>
-              <p:nextCondLst>
-                <p:cond evt="onNext" delay="0">
-                  <p:tgtEl>
-                    <p:sldTgt/>
-                  </p:tgtEl>
-                </p:cond>
-              </p:nextCondLst>
-            </p:seq>
-          </p:childTnLst>
-        </p:cTn>
-      </p:par>
-    </p:tnLst>
-    <p:bldLst>
-      <p:bldP spid="3" grpId="0" uiExpand="1" build="p"/>
-    </p:bldLst>
-  </p:timing>
 </p:sld>
 </file>
 
@@ -3873,186 +3464,6 @@
       </p:sp>
     </p:spTree>
   </p:cSld>
-  <p:timing>
-    <p:tnLst>
-      <p:par>
-        <p:cTn id="1" dur="indefinite" restart="never" nodeType="tmRoot">
-          <p:childTnLst>
-            <p:seq concurrent="1" nextAc="seek">
-              <p:cTn id="2" dur="indefinite" nodeType="mainSeq">
-                <p:childTnLst>
-                  <p:par>
-                    <p:cTn id="3" fill="hold">
-                      <p:stCondLst>
-                        <p:cond delay="indefinite"/>
-                      </p:stCondLst>
-                      <p:childTnLst>
-                        <p:par>
-                          <p:cTn id="4" fill="hold">
-                            <p:stCondLst>
-                              <p:cond delay="0"/>
-                            </p:stCondLst>
-                            <p:childTnLst>
-                              <p:par>
-                                <p:cTn id="5" presetID="1" presetClass="entr" presetSubtype="0" fill="hold" grpId="0" nodeType="clickEffect">
-                                  <p:stCondLst>
-                                    <p:cond delay="0"/>
-                                  </p:stCondLst>
-                                  <p:childTnLst>
-                                    <p:set>
-                                      <p:cBhvr>
-                                        <p:cTn id="6" dur="1" fill="hold">
-                                          <p:stCondLst>
-                                            <p:cond delay="0"/>
-                                          </p:stCondLst>
-                                        </p:cTn>
-                                        <p:tgtEl>
-                                          <p:spTgt spid="3">
-                                            <p:txEl>
-                                              <p:pRg st="1" end="1"/>
-                                            </p:txEl>
-                                          </p:spTgt>
-                                        </p:tgtEl>
-                                        <p:attrNameLst>
-                                          <p:attrName>style.visibility</p:attrName>
-                                        </p:attrNameLst>
-                                      </p:cBhvr>
-                                      <p:to>
-                                        <p:strVal val="visible"/>
-                                      </p:to>
-                                    </p:set>
-                                  </p:childTnLst>
-                                </p:cTn>
-                              </p:par>
-                            </p:childTnLst>
-                          </p:cTn>
-                        </p:par>
-                      </p:childTnLst>
-                    </p:cTn>
-                  </p:par>
-                  <p:par>
-                    <p:cTn id="7" fill="hold">
-                      <p:stCondLst>
-                        <p:cond delay="indefinite"/>
-                      </p:stCondLst>
-                      <p:childTnLst>
-                        <p:par>
-                          <p:cTn id="8" fill="hold">
-                            <p:stCondLst>
-                              <p:cond delay="0"/>
-                            </p:stCondLst>
-                            <p:childTnLst>
-                              <p:par>
-                                <p:cTn id="9" presetID="1" presetClass="entr" presetSubtype="0" fill="hold" grpId="0" nodeType="clickEffect">
-                                  <p:stCondLst>
-                                    <p:cond delay="0"/>
-                                  </p:stCondLst>
-                                  <p:childTnLst>
-                                    <p:set>
-                                      <p:cBhvr>
-                                        <p:cTn id="10" dur="1" fill="hold">
-                                          <p:stCondLst>
-                                            <p:cond delay="0"/>
-                                          </p:stCondLst>
-                                        </p:cTn>
-                                        <p:tgtEl>
-                                          <p:spTgt spid="3">
-                                            <p:txEl>
-                                              <p:pRg st="2" end="2"/>
-                                            </p:txEl>
-                                          </p:spTgt>
-                                        </p:tgtEl>
-                                        <p:attrNameLst>
-                                          <p:attrName>style.visibility</p:attrName>
-                                        </p:attrNameLst>
-                                      </p:cBhvr>
-                                      <p:to>
-                                        <p:strVal val="visible"/>
-                                      </p:to>
-                                    </p:set>
-                                  </p:childTnLst>
-                                </p:cTn>
-                              </p:par>
-                            </p:childTnLst>
-                          </p:cTn>
-                        </p:par>
-                      </p:childTnLst>
-                    </p:cTn>
-                  </p:par>
-                  <p:par>
-                    <p:cTn id="11" fill="hold">
-                      <p:stCondLst>
-                        <p:cond delay="indefinite"/>
-                      </p:stCondLst>
-                      <p:childTnLst>
-                        <p:par>
-                          <p:cTn id="12" fill="hold">
-                            <p:stCondLst>
-                              <p:cond delay="0"/>
-                            </p:stCondLst>
-                            <p:childTnLst>
-                              <p:par>
-                                <p:cTn id="13" presetID="1" presetClass="entr" presetSubtype="0" fill="hold" grpId="0" nodeType="clickEffect">
-                                  <p:stCondLst>
-                                    <p:cond delay="0"/>
-                                  </p:stCondLst>
-                                  <p:childTnLst>
-                                    <p:set>
-                                      <p:cBhvr>
-                                        <p:cTn id="14" dur="1" fill="hold">
-                                          <p:stCondLst>
-                                            <p:cond delay="0"/>
-                                          </p:stCondLst>
-                                        </p:cTn>
-                                        <p:tgtEl>
-                                          <p:spTgt spid="3">
-                                            <p:txEl>
-                                              <p:pRg st="3" end="3"/>
-                                            </p:txEl>
-                                          </p:spTgt>
-                                        </p:tgtEl>
-                                        <p:attrNameLst>
-                                          <p:attrName>style.visibility</p:attrName>
-                                        </p:attrNameLst>
-                                      </p:cBhvr>
-                                      <p:to>
-                                        <p:strVal val="visible"/>
-                                      </p:to>
-                                    </p:set>
-                                  </p:childTnLst>
-                                </p:cTn>
-                              </p:par>
-                            </p:childTnLst>
-                          </p:cTn>
-                        </p:par>
-                      </p:childTnLst>
-                    </p:cTn>
-                  </p:par>
-                </p:childTnLst>
-              </p:cTn>
-              <p:prevCondLst>
-                <p:cond evt="onPrev" delay="0">
-                  <p:tgtEl>
-                    <p:sldTgt/>
-                  </p:tgtEl>
-                </p:cond>
-              </p:prevCondLst>
-              <p:nextCondLst>
-                <p:cond evt="onNext" delay="0">
-                  <p:tgtEl>
-                    <p:sldTgt/>
-                  </p:tgtEl>
-                </p:cond>
-              </p:nextCondLst>
-            </p:seq>
-          </p:childTnLst>
-        </p:cTn>
-      </p:par>
-    </p:tnLst>
-    <p:bldLst>
-      <p:bldP spid="3" grpId="0" uiExpand="1" build="p"/>
-    </p:bldLst>
-  </p:timing>
 </p:sld>
 </file>
 
@@ -4199,284 +3610,6 @@
       </p:sp>
     </p:spTree>
   </p:cSld>
-  <p:timing>
-    <p:tnLst>
-      <p:par>
-        <p:cTn id="1" dur="indefinite" restart="never" nodeType="tmRoot">
-          <p:childTnLst>
-            <p:seq concurrent="1" nextAc="seek">
-              <p:cTn id="2" dur="indefinite" nodeType="mainSeq">
-                <p:childTnLst>
-                  <p:par>
-                    <p:cTn id="3" fill="hold">
-                      <p:stCondLst>
-                        <p:cond delay="indefinite"/>
-                      </p:stCondLst>
-                      <p:childTnLst>
-                        <p:par>
-                          <p:cTn id="4" fill="hold">
-                            <p:stCondLst>
-                              <p:cond delay="0"/>
-                            </p:stCondLst>
-                            <p:childTnLst>
-                              <p:par>
-                                <p:cTn id="5" presetID="1" presetClass="entr" presetSubtype="0" fill="hold" grpId="0" nodeType="clickEffect">
-                                  <p:stCondLst>
-                                    <p:cond delay="0"/>
-                                  </p:stCondLst>
-                                  <p:childTnLst>
-                                    <p:set>
-                                      <p:cBhvr>
-                                        <p:cTn id="6" dur="1" fill="hold">
-                                          <p:stCondLst>
-                                            <p:cond delay="0"/>
-                                          </p:stCondLst>
-                                        </p:cTn>
-                                        <p:tgtEl>
-                                          <p:spTgt spid="3">
-                                            <p:txEl>
-                                              <p:pRg st="0" end="0"/>
-                                            </p:txEl>
-                                          </p:spTgt>
-                                        </p:tgtEl>
-                                        <p:attrNameLst>
-                                          <p:attrName>style.visibility</p:attrName>
-                                        </p:attrNameLst>
-                                      </p:cBhvr>
-                                      <p:to>
-                                        <p:strVal val="visible"/>
-                                      </p:to>
-                                    </p:set>
-                                  </p:childTnLst>
-                                </p:cTn>
-                              </p:par>
-                            </p:childTnLst>
-                          </p:cTn>
-                        </p:par>
-                      </p:childTnLst>
-                    </p:cTn>
-                  </p:par>
-                  <p:par>
-                    <p:cTn id="7" fill="hold">
-                      <p:stCondLst>
-                        <p:cond delay="indefinite"/>
-                      </p:stCondLst>
-                      <p:childTnLst>
-                        <p:par>
-                          <p:cTn id="8" fill="hold">
-                            <p:stCondLst>
-                              <p:cond delay="0"/>
-                            </p:stCondLst>
-                            <p:childTnLst>
-                              <p:par>
-                                <p:cTn id="9" presetID="1" presetClass="entr" presetSubtype="0" fill="hold" grpId="0" nodeType="clickEffect">
-                                  <p:stCondLst>
-                                    <p:cond delay="0"/>
-                                  </p:stCondLst>
-                                  <p:childTnLst>
-                                    <p:set>
-                                      <p:cBhvr>
-                                        <p:cTn id="10" dur="1" fill="hold">
-                                          <p:stCondLst>
-                                            <p:cond delay="0"/>
-                                          </p:stCondLst>
-                                        </p:cTn>
-                                        <p:tgtEl>
-                                          <p:spTgt spid="3">
-                                            <p:txEl>
-                                              <p:pRg st="1" end="1"/>
-                                            </p:txEl>
-                                          </p:spTgt>
-                                        </p:tgtEl>
-                                        <p:attrNameLst>
-                                          <p:attrName>style.visibility</p:attrName>
-                                        </p:attrNameLst>
-                                      </p:cBhvr>
-                                      <p:to>
-                                        <p:strVal val="visible"/>
-                                      </p:to>
-                                    </p:set>
-                                  </p:childTnLst>
-                                </p:cTn>
-                              </p:par>
-                            </p:childTnLst>
-                          </p:cTn>
-                        </p:par>
-                      </p:childTnLst>
-                    </p:cTn>
-                  </p:par>
-                  <p:par>
-                    <p:cTn id="11" fill="hold">
-                      <p:stCondLst>
-                        <p:cond delay="indefinite"/>
-                      </p:stCondLst>
-                      <p:childTnLst>
-                        <p:par>
-                          <p:cTn id="12" fill="hold">
-                            <p:stCondLst>
-                              <p:cond delay="0"/>
-                            </p:stCondLst>
-                            <p:childTnLst>
-                              <p:par>
-                                <p:cTn id="13" presetID="1" presetClass="entr" presetSubtype="0" fill="hold" grpId="0" nodeType="clickEffect">
-                                  <p:stCondLst>
-                                    <p:cond delay="0"/>
-                                  </p:stCondLst>
-                                  <p:childTnLst>
-                                    <p:set>
-                                      <p:cBhvr>
-                                        <p:cTn id="14" dur="1" fill="hold">
-                                          <p:stCondLst>
-                                            <p:cond delay="0"/>
-                                          </p:stCondLst>
-                                        </p:cTn>
-                                        <p:tgtEl>
-                                          <p:spTgt spid="3">
-                                            <p:txEl>
-                                              <p:pRg st="2" end="2"/>
-                                            </p:txEl>
-                                          </p:spTgt>
-                                        </p:tgtEl>
-                                        <p:attrNameLst>
-                                          <p:attrName>style.visibility</p:attrName>
-                                        </p:attrNameLst>
-                                      </p:cBhvr>
-                                      <p:to>
-                                        <p:strVal val="visible"/>
-                                      </p:to>
-                                    </p:set>
-                                  </p:childTnLst>
-                                </p:cTn>
-                              </p:par>
-                            </p:childTnLst>
-                          </p:cTn>
-                        </p:par>
-                      </p:childTnLst>
-                    </p:cTn>
-                  </p:par>
-                  <p:par>
-                    <p:cTn id="15" fill="hold">
-                      <p:stCondLst>
-                        <p:cond delay="indefinite"/>
-                      </p:stCondLst>
-                      <p:childTnLst>
-                        <p:par>
-                          <p:cTn id="16" fill="hold">
-                            <p:stCondLst>
-                              <p:cond delay="0"/>
-                            </p:stCondLst>
-                            <p:childTnLst>
-                              <p:par>
-                                <p:cTn id="17" presetID="1" presetClass="entr" presetSubtype="0" fill="hold" grpId="0" nodeType="clickEffect">
-                                  <p:stCondLst>
-                                    <p:cond delay="0"/>
-                                  </p:stCondLst>
-                                  <p:childTnLst>
-                                    <p:set>
-                                      <p:cBhvr>
-                                        <p:cTn id="18" dur="1" fill="hold">
-                                          <p:stCondLst>
-                                            <p:cond delay="0"/>
-                                          </p:stCondLst>
-                                        </p:cTn>
-                                        <p:tgtEl>
-                                          <p:spTgt spid="3">
-                                            <p:txEl>
-                                              <p:pRg st="3" end="3"/>
-                                            </p:txEl>
-                                          </p:spTgt>
-                                        </p:tgtEl>
-                                        <p:attrNameLst>
-                                          <p:attrName>style.visibility</p:attrName>
-                                        </p:attrNameLst>
-                                      </p:cBhvr>
-                                      <p:to>
-                                        <p:strVal val="visible"/>
-                                      </p:to>
-                                    </p:set>
-                                  </p:childTnLst>
-                                </p:cTn>
-                              </p:par>
-                            </p:childTnLst>
-                          </p:cTn>
-                        </p:par>
-                      </p:childTnLst>
-                    </p:cTn>
-                  </p:par>
-                  <p:par>
-                    <p:cTn id="19" fill="hold">
-                      <p:stCondLst>
-                        <p:cond delay="indefinite"/>
-                      </p:stCondLst>
-                      <p:childTnLst>
-                        <p:par>
-                          <p:cTn id="20" fill="hold">
-                            <p:stCondLst>
-                              <p:cond delay="0"/>
-                            </p:stCondLst>
-                            <p:childTnLst>
-                              <p:par>
-                                <p:cTn id="21" presetID="1" presetClass="entr" presetSubtype="0" fill="hold" grpId="0" nodeType="clickEffect">
-                                  <p:stCondLst>
-                                    <p:cond delay="0"/>
-                                  </p:stCondLst>
-                                  <p:childTnLst>
-                                    <p:set>
-                                      <p:cBhvr>
-                                        <p:cTn id="22" dur="1" fill="hold">
-                                          <p:stCondLst>
-                                            <p:cond delay="0"/>
-                                          </p:stCondLst>
-                                        </p:cTn>
-                                        <p:tgtEl>
-                                          <p:spTgt spid="3">
-                                            <p:txEl>
-                                              <p:pRg st="4" end="4"/>
-                                            </p:txEl>
-                                          </p:spTgt>
-                                        </p:tgtEl>
-                                        <p:attrNameLst>
-                                          <p:attrName>style.visibility</p:attrName>
-                                        </p:attrNameLst>
-                                      </p:cBhvr>
-                                      <p:to>
-                                        <p:strVal val="visible"/>
-                                      </p:to>
-                                    </p:set>
-                                  </p:childTnLst>
-                                </p:cTn>
-                              </p:par>
-                            </p:childTnLst>
-                          </p:cTn>
-                        </p:par>
-                      </p:childTnLst>
-                    </p:cTn>
-                  </p:par>
-                </p:childTnLst>
-              </p:cTn>
-              <p:prevCondLst>
-                <p:cond evt="onPrev" delay="0">
-                  <p:tgtEl>
-                    <p:sldTgt/>
-                  </p:tgtEl>
-                </p:cond>
-              </p:prevCondLst>
-              <p:nextCondLst>
-                <p:cond evt="onNext" delay="0">
-                  <p:tgtEl>
-                    <p:sldTgt/>
-                  </p:tgtEl>
-                </p:cond>
-              </p:nextCondLst>
-            </p:seq>
-          </p:childTnLst>
-        </p:cTn>
-      </p:par>
-    </p:tnLst>
-    <p:bldLst>
-      <p:bldP spid="3" grpId="0" uiExpand="1" build="p"/>
-    </p:bldLst>
-  </p:timing>
 </p:sld>
 </file>
 
@@ -4655,382 +3788,6 @@
       </p:sp>
     </p:spTree>
   </p:cSld>
-  <p:timing>
-    <p:tnLst>
-      <p:par>
-        <p:cTn id="1" dur="indefinite" restart="never" nodeType="tmRoot">
-          <p:childTnLst>
-            <p:seq concurrent="1" nextAc="seek">
-              <p:cTn id="2" dur="indefinite" nodeType="mainSeq">
-                <p:childTnLst>
-                  <p:par>
-                    <p:cTn id="3" fill="hold">
-                      <p:stCondLst>
-                        <p:cond delay="indefinite"/>
-                      </p:stCondLst>
-                      <p:childTnLst>
-                        <p:par>
-                          <p:cTn id="4" fill="hold">
-                            <p:stCondLst>
-                              <p:cond delay="0"/>
-                            </p:stCondLst>
-                            <p:childTnLst>
-                              <p:par>
-                                <p:cTn id="5" presetID="1" presetClass="entr" presetSubtype="0" fill="hold" grpId="0" nodeType="clickEffect">
-                                  <p:stCondLst>
-                                    <p:cond delay="0"/>
-                                  </p:stCondLst>
-                                  <p:childTnLst>
-                                    <p:set>
-                                      <p:cBhvr>
-                                        <p:cTn id="6" dur="1" fill="hold">
-                                          <p:stCondLst>
-                                            <p:cond delay="0"/>
-                                          </p:stCondLst>
-                                        </p:cTn>
-                                        <p:tgtEl>
-                                          <p:spTgt spid="3">
-                                            <p:txEl>
-                                              <p:pRg st="0" end="0"/>
-                                            </p:txEl>
-                                          </p:spTgt>
-                                        </p:tgtEl>
-                                        <p:attrNameLst>
-                                          <p:attrName>style.visibility</p:attrName>
-                                        </p:attrNameLst>
-                                      </p:cBhvr>
-                                      <p:to>
-                                        <p:strVal val="visible"/>
-                                      </p:to>
-                                    </p:set>
-                                  </p:childTnLst>
-                                </p:cTn>
-                              </p:par>
-                            </p:childTnLst>
-                          </p:cTn>
-                        </p:par>
-                      </p:childTnLst>
-                    </p:cTn>
-                  </p:par>
-                  <p:par>
-                    <p:cTn id="7" fill="hold">
-                      <p:stCondLst>
-                        <p:cond delay="indefinite"/>
-                      </p:stCondLst>
-                      <p:childTnLst>
-                        <p:par>
-                          <p:cTn id="8" fill="hold">
-                            <p:stCondLst>
-                              <p:cond delay="0"/>
-                            </p:stCondLst>
-                            <p:childTnLst>
-                              <p:par>
-                                <p:cTn id="9" presetID="1" presetClass="entr" presetSubtype="0" fill="hold" grpId="0" nodeType="clickEffect">
-                                  <p:stCondLst>
-                                    <p:cond delay="0"/>
-                                  </p:stCondLst>
-                                  <p:childTnLst>
-                                    <p:set>
-                                      <p:cBhvr>
-                                        <p:cTn id="10" dur="1" fill="hold">
-                                          <p:stCondLst>
-                                            <p:cond delay="0"/>
-                                          </p:stCondLst>
-                                        </p:cTn>
-                                        <p:tgtEl>
-                                          <p:spTgt spid="3">
-                                            <p:txEl>
-                                              <p:pRg st="1" end="1"/>
-                                            </p:txEl>
-                                          </p:spTgt>
-                                        </p:tgtEl>
-                                        <p:attrNameLst>
-                                          <p:attrName>style.visibility</p:attrName>
-                                        </p:attrNameLst>
-                                      </p:cBhvr>
-                                      <p:to>
-                                        <p:strVal val="visible"/>
-                                      </p:to>
-                                    </p:set>
-                                  </p:childTnLst>
-                                </p:cTn>
-                              </p:par>
-                            </p:childTnLst>
-                          </p:cTn>
-                        </p:par>
-                      </p:childTnLst>
-                    </p:cTn>
-                  </p:par>
-                  <p:par>
-                    <p:cTn id="11" fill="hold">
-                      <p:stCondLst>
-                        <p:cond delay="indefinite"/>
-                      </p:stCondLst>
-                      <p:childTnLst>
-                        <p:par>
-                          <p:cTn id="12" fill="hold">
-                            <p:stCondLst>
-                              <p:cond delay="0"/>
-                            </p:stCondLst>
-                            <p:childTnLst>
-                              <p:par>
-                                <p:cTn id="13" presetID="1" presetClass="entr" presetSubtype="0" fill="hold" grpId="0" nodeType="clickEffect">
-                                  <p:stCondLst>
-                                    <p:cond delay="0"/>
-                                  </p:stCondLst>
-                                  <p:childTnLst>
-                                    <p:set>
-                                      <p:cBhvr>
-                                        <p:cTn id="14" dur="1" fill="hold">
-                                          <p:stCondLst>
-                                            <p:cond delay="0"/>
-                                          </p:stCondLst>
-                                        </p:cTn>
-                                        <p:tgtEl>
-                                          <p:spTgt spid="3">
-                                            <p:txEl>
-                                              <p:pRg st="2" end="2"/>
-                                            </p:txEl>
-                                          </p:spTgt>
-                                        </p:tgtEl>
-                                        <p:attrNameLst>
-                                          <p:attrName>style.visibility</p:attrName>
-                                        </p:attrNameLst>
-                                      </p:cBhvr>
-                                      <p:to>
-                                        <p:strVal val="visible"/>
-                                      </p:to>
-                                    </p:set>
-                                  </p:childTnLst>
-                                </p:cTn>
-                              </p:par>
-                            </p:childTnLst>
-                          </p:cTn>
-                        </p:par>
-                      </p:childTnLst>
-                    </p:cTn>
-                  </p:par>
-                  <p:par>
-                    <p:cTn id="15" fill="hold">
-                      <p:stCondLst>
-                        <p:cond delay="indefinite"/>
-                      </p:stCondLst>
-                      <p:childTnLst>
-                        <p:par>
-                          <p:cTn id="16" fill="hold">
-                            <p:stCondLst>
-                              <p:cond delay="0"/>
-                            </p:stCondLst>
-                            <p:childTnLst>
-                              <p:par>
-                                <p:cTn id="17" presetID="1" presetClass="entr" presetSubtype="0" fill="hold" grpId="0" nodeType="clickEffect">
-                                  <p:stCondLst>
-                                    <p:cond delay="0"/>
-                                  </p:stCondLst>
-                                  <p:childTnLst>
-                                    <p:set>
-                                      <p:cBhvr>
-                                        <p:cTn id="18" dur="1" fill="hold">
-                                          <p:stCondLst>
-                                            <p:cond delay="0"/>
-                                          </p:stCondLst>
-                                        </p:cTn>
-                                        <p:tgtEl>
-                                          <p:spTgt spid="3">
-                                            <p:txEl>
-                                              <p:pRg st="3" end="3"/>
-                                            </p:txEl>
-                                          </p:spTgt>
-                                        </p:tgtEl>
-                                        <p:attrNameLst>
-                                          <p:attrName>style.visibility</p:attrName>
-                                        </p:attrNameLst>
-                                      </p:cBhvr>
-                                      <p:to>
-                                        <p:strVal val="visible"/>
-                                      </p:to>
-                                    </p:set>
-                                  </p:childTnLst>
-                                </p:cTn>
-                              </p:par>
-                            </p:childTnLst>
-                          </p:cTn>
-                        </p:par>
-                      </p:childTnLst>
-                    </p:cTn>
-                  </p:par>
-                  <p:par>
-                    <p:cTn id="19" fill="hold">
-                      <p:stCondLst>
-                        <p:cond delay="indefinite"/>
-                      </p:stCondLst>
-                      <p:childTnLst>
-                        <p:par>
-                          <p:cTn id="20" fill="hold">
-                            <p:stCondLst>
-                              <p:cond delay="0"/>
-                            </p:stCondLst>
-                            <p:childTnLst>
-                              <p:par>
-                                <p:cTn id="21" presetID="1" presetClass="entr" presetSubtype="0" fill="hold" grpId="0" nodeType="clickEffect">
-                                  <p:stCondLst>
-                                    <p:cond delay="0"/>
-                                  </p:stCondLst>
-                                  <p:childTnLst>
-                                    <p:set>
-                                      <p:cBhvr>
-                                        <p:cTn id="22" dur="1" fill="hold">
-                                          <p:stCondLst>
-                                            <p:cond delay="0"/>
-                                          </p:stCondLst>
-                                        </p:cTn>
-                                        <p:tgtEl>
-                                          <p:spTgt spid="3">
-                                            <p:txEl>
-                                              <p:pRg st="4" end="4"/>
-                                            </p:txEl>
-                                          </p:spTgt>
-                                        </p:tgtEl>
-                                        <p:attrNameLst>
-                                          <p:attrName>style.visibility</p:attrName>
-                                        </p:attrNameLst>
-                                      </p:cBhvr>
-                                      <p:to>
-                                        <p:strVal val="visible"/>
-                                      </p:to>
-                                    </p:set>
-                                  </p:childTnLst>
-                                </p:cTn>
-                              </p:par>
-                            </p:childTnLst>
-                          </p:cTn>
-                        </p:par>
-                      </p:childTnLst>
-                    </p:cTn>
-                  </p:par>
-                  <p:par>
-                    <p:cTn id="23" fill="hold">
-                      <p:stCondLst>
-                        <p:cond delay="indefinite"/>
-                      </p:stCondLst>
-                      <p:childTnLst>
-                        <p:par>
-                          <p:cTn id="24" fill="hold">
-                            <p:stCondLst>
-                              <p:cond delay="0"/>
-                            </p:stCondLst>
-                            <p:childTnLst>
-                              <p:par>
-                                <p:cTn id="25" presetID="1" presetClass="entr" presetSubtype="0" fill="hold" grpId="0" nodeType="clickEffect">
-                                  <p:stCondLst>
-                                    <p:cond delay="0"/>
-                                  </p:stCondLst>
-                                  <p:childTnLst>
-                                    <p:set>
-                                      <p:cBhvr>
-                                        <p:cTn id="26" dur="1" fill="hold">
-                                          <p:stCondLst>
-                                            <p:cond delay="0"/>
-                                          </p:stCondLst>
-                                        </p:cTn>
-                                        <p:tgtEl>
-                                          <p:spTgt spid="3">
-                                            <p:txEl>
-                                              <p:pRg st="5" end="5"/>
-                                            </p:txEl>
-                                          </p:spTgt>
-                                        </p:tgtEl>
-                                        <p:attrNameLst>
-                                          <p:attrName>style.visibility</p:attrName>
-                                        </p:attrNameLst>
-                                      </p:cBhvr>
-                                      <p:to>
-                                        <p:strVal val="visible"/>
-                                      </p:to>
-                                    </p:set>
-                                  </p:childTnLst>
-                                </p:cTn>
-                              </p:par>
-                            </p:childTnLst>
-                          </p:cTn>
-                        </p:par>
-                      </p:childTnLst>
-                    </p:cTn>
-                  </p:par>
-                  <p:par>
-                    <p:cTn id="27" fill="hold">
-                      <p:stCondLst>
-                        <p:cond delay="indefinite"/>
-                      </p:stCondLst>
-                      <p:childTnLst>
-                        <p:par>
-                          <p:cTn id="28" fill="hold">
-                            <p:stCondLst>
-                              <p:cond delay="0"/>
-                            </p:stCondLst>
-                            <p:childTnLst>
-                              <p:par>
-                                <p:cTn id="29" presetID="1" presetClass="entr" presetSubtype="0" fill="hold" grpId="0" nodeType="clickEffect">
-                                  <p:stCondLst>
-                                    <p:cond delay="0"/>
-                                  </p:stCondLst>
-                                  <p:childTnLst>
-                                    <p:set>
-                                      <p:cBhvr>
-                                        <p:cTn id="30" dur="1" fill="hold">
-                                          <p:stCondLst>
-                                            <p:cond delay="0"/>
-                                          </p:stCondLst>
-                                        </p:cTn>
-                                        <p:tgtEl>
-                                          <p:spTgt spid="3">
-                                            <p:txEl>
-                                              <p:pRg st="6" end="6"/>
-                                            </p:txEl>
-                                          </p:spTgt>
-                                        </p:tgtEl>
-                                        <p:attrNameLst>
-                                          <p:attrName>style.visibility</p:attrName>
-                                        </p:attrNameLst>
-                                      </p:cBhvr>
-                                      <p:to>
-                                        <p:strVal val="visible"/>
-                                      </p:to>
-                                    </p:set>
-                                  </p:childTnLst>
-                                </p:cTn>
-                              </p:par>
-                            </p:childTnLst>
-                          </p:cTn>
-                        </p:par>
-                      </p:childTnLst>
-                    </p:cTn>
-                  </p:par>
-                </p:childTnLst>
-              </p:cTn>
-              <p:prevCondLst>
-                <p:cond evt="onPrev" delay="0">
-                  <p:tgtEl>
-                    <p:sldTgt/>
-                  </p:tgtEl>
-                </p:cond>
-              </p:prevCondLst>
-              <p:nextCondLst>
-                <p:cond evt="onNext" delay="0">
-                  <p:tgtEl>
-                    <p:sldTgt/>
-                  </p:tgtEl>
-                </p:cond>
-              </p:nextCondLst>
-            </p:seq>
-          </p:childTnLst>
-        </p:cTn>
-      </p:par>
-    </p:tnLst>
-    <p:bldLst>
-      <p:bldP spid="3" grpId="0" uiExpand="1" build="p"/>
-    </p:bldLst>
-  </p:timing>
 </p:sld>
 </file>
 
@@ -5183,382 +3940,6 @@
       </p:sp>
     </p:spTree>
   </p:cSld>
-  <p:timing>
-    <p:tnLst>
-      <p:par>
-        <p:cTn id="1" dur="indefinite" restart="never" nodeType="tmRoot">
-          <p:childTnLst>
-            <p:seq concurrent="1" nextAc="seek">
-              <p:cTn id="2" dur="indefinite" nodeType="mainSeq">
-                <p:childTnLst>
-                  <p:par>
-                    <p:cTn id="3" fill="hold">
-                      <p:stCondLst>
-                        <p:cond delay="indefinite"/>
-                      </p:stCondLst>
-                      <p:childTnLst>
-                        <p:par>
-                          <p:cTn id="4" fill="hold">
-                            <p:stCondLst>
-                              <p:cond delay="0"/>
-                            </p:stCondLst>
-                            <p:childTnLst>
-                              <p:par>
-                                <p:cTn id="5" presetID="1" presetClass="entr" presetSubtype="0" fill="hold" grpId="0" nodeType="clickEffect">
-                                  <p:stCondLst>
-                                    <p:cond delay="0"/>
-                                  </p:stCondLst>
-                                  <p:childTnLst>
-                                    <p:set>
-                                      <p:cBhvr>
-                                        <p:cTn id="6" dur="1" fill="hold">
-                                          <p:stCondLst>
-                                            <p:cond delay="0"/>
-                                          </p:stCondLst>
-                                        </p:cTn>
-                                        <p:tgtEl>
-                                          <p:spTgt spid="3">
-                                            <p:txEl>
-                                              <p:pRg st="0" end="0"/>
-                                            </p:txEl>
-                                          </p:spTgt>
-                                        </p:tgtEl>
-                                        <p:attrNameLst>
-                                          <p:attrName>style.visibility</p:attrName>
-                                        </p:attrNameLst>
-                                      </p:cBhvr>
-                                      <p:to>
-                                        <p:strVal val="visible"/>
-                                      </p:to>
-                                    </p:set>
-                                  </p:childTnLst>
-                                </p:cTn>
-                              </p:par>
-                            </p:childTnLst>
-                          </p:cTn>
-                        </p:par>
-                      </p:childTnLst>
-                    </p:cTn>
-                  </p:par>
-                  <p:par>
-                    <p:cTn id="7" fill="hold">
-                      <p:stCondLst>
-                        <p:cond delay="indefinite"/>
-                      </p:stCondLst>
-                      <p:childTnLst>
-                        <p:par>
-                          <p:cTn id="8" fill="hold">
-                            <p:stCondLst>
-                              <p:cond delay="0"/>
-                            </p:stCondLst>
-                            <p:childTnLst>
-                              <p:par>
-                                <p:cTn id="9" presetID="1" presetClass="entr" presetSubtype="0" fill="hold" grpId="0" nodeType="clickEffect">
-                                  <p:stCondLst>
-                                    <p:cond delay="0"/>
-                                  </p:stCondLst>
-                                  <p:childTnLst>
-                                    <p:set>
-                                      <p:cBhvr>
-                                        <p:cTn id="10" dur="1" fill="hold">
-                                          <p:stCondLst>
-                                            <p:cond delay="0"/>
-                                          </p:stCondLst>
-                                        </p:cTn>
-                                        <p:tgtEl>
-                                          <p:spTgt spid="3">
-                                            <p:txEl>
-                                              <p:pRg st="1" end="1"/>
-                                            </p:txEl>
-                                          </p:spTgt>
-                                        </p:tgtEl>
-                                        <p:attrNameLst>
-                                          <p:attrName>style.visibility</p:attrName>
-                                        </p:attrNameLst>
-                                      </p:cBhvr>
-                                      <p:to>
-                                        <p:strVal val="visible"/>
-                                      </p:to>
-                                    </p:set>
-                                  </p:childTnLst>
-                                </p:cTn>
-                              </p:par>
-                            </p:childTnLst>
-                          </p:cTn>
-                        </p:par>
-                      </p:childTnLst>
-                    </p:cTn>
-                  </p:par>
-                  <p:par>
-                    <p:cTn id="11" fill="hold">
-                      <p:stCondLst>
-                        <p:cond delay="indefinite"/>
-                      </p:stCondLst>
-                      <p:childTnLst>
-                        <p:par>
-                          <p:cTn id="12" fill="hold">
-                            <p:stCondLst>
-                              <p:cond delay="0"/>
-                            </p:stCondLst>
-                            <p:childTnLst>
-                              <p:par>
-                                <p:cTn id="13" presetID="1" presetClass="entr" presetSubtype="0" fill="hold" grpId="0" nodeType="clickEffect">
-                                  <p:stCondLst>
-                                    <p:cond delay="0"/>
-                                  </p:stCondLst>
-                                  <p:childTnLst>
-                                    <p:set>
-                                      <p:cBhvr>
-                                        <p:cTn id="14" dur="1" fill="hold">
-                                          <p:stCondLst>
-                                            <p:cond delay="0"/>
-                                          </p:stCondLst>
-                                        </p:cTn>
-                                        <p:tgtEl>
-                                          <p:spTgt spid="3">
-                                            <p:txEl>
-                                              <p:pRg st="2" end="2"/>
-                                            </p:txEl>
-                                          </p:spTgt>
-                                        </p:tgtEl>
-                                        <p:attrNameLst>
-                                          <p:attrName>style.visibility</p:attrName>
-                                        </p:attrNameLst>
-                                      </p:cBhvr>
-                                      <p:to>
-                                        <p:strVal val="visible"/>
-                                      </p:to>
-                                    </p:set>
-                                  </p:childTnLst>
-                                </p:cTn>
-                              </p:par>
-                            </p:childTnLst>
-                          </p:cTn>
-                        </p:par>
-                      </p:childTnLst>
-                    </p:cTn>
-                  </p:par>
-                  <p:par>
-                    <p:cTn id="15" fill="hold">
-                      <p:stCondLst>
-                        <p:cond delay="indefinite"/>
-                      </p:stCondLst>
-                      <p:childTnLst>
-                        <p:par>
-                          <p:cTn id="16" fill="hold">
-                            <p:stCondLst>
-                              <p:cond delay="0"/>
-                            </p:stCondLst>
-                            <p:childTnLst>
-                              <p:par>
-                                <p:cTn id="17" presetID="1" presetClass="entr" presetSubtype="0" fill="hold" grpId="0" nodeType="clickEffect">
-                                  <p:stCondLst>
-                                    <p:cond delay="0"/>
-                                  </p:stCondLst>
-                                  <p:childTnLst>
-                                    <p:set>
-                                      <p:cBhvr>
-                                        <p:cTn id="18" dur="1" fill="hold">
-                                          <p:stCondLst>
-                                            <p:cond delay="0"/>
-                                          </p:stCondLst>
-                                        </p:cTn>
-                                        <p:tgtEl>
-                                          <p:spTgt spid="3">
-                                            <p:txEl>
-                                              <p:pRg st="3" end="3"/>
-                                            </p:txEl>
-                                          </p:spTgt>
-                                        </p:tgtEl>
-                                        <p:attrNameLst>
-                                          <p:attrName>style.visibility</p:attrName>
-                                        </p:attrNameLst>
-                                      </p:cBhvr>
-                                      <p:to>
-                                        <p:strVal val="visible"/>
-                                      </p:to>
-                                    </p:set>
-                                  </p:childTnLst>
-                                </p:cTn>
-                              </p:par>
-                            </p:childTnLst>
-                          </p:cTn>
-                        </p:par>
-                      </p:childTnLst>
-                    </p:cTn>
-                  </p:par>
-                  <p:par>
-                    <p:cTn id="19" fill="hold">
-                      <p:stCondLst>
-                        <p:cond delay="indefinite"/>
-                      </p:stCondLst>
-                      <p:childTnLst>
-                        <p:par>
-                          <p:cTn id="20" fill="hold">
-                            <p:stCondLst>
-                              <p:cond delay="0"/>
-                            </p:stCondLst>
-                            <p:childTnLst>
-                              <p:par>
-                                <p:cTn id="21" presetID="1" presetClass="entr" presetSubtype="0" fill="hold" grpId="0" nodeType="clickEffect">
-                                  <p:stCondLst>
-                                    <p:cond delay="0"/>
-                                  </p:stCondLst>
-                                  <p:childTnLst>
-                                    <p:set>
-                                      <p:cBhvr>
-                                        <p:cTn id="22" dur="1" fill="hold">
-                                          <p:stCondLst>
-                                            <p:cond delay="0"/>
-                                          </p:stCondLst>
-                                        </p:cTn>
-                                        <p:tgtEl>
-                                          <p:spTgt spid="3">
-                                            <p:txEl>
-                                              <p:pRg st="4" end="4"/>
-                                            </p:txEl>
-                                          </p:spTgt>
-                                        </p:tgtEl>
-                                        <p:attrNameLst>
-                                          <p:attrName>style.visibility</p:attrName>
-                                        </p:attrNameLst>
-                                      </p:cBhvr>
-                                      <p:to>
-                                        <p:strVal val="visible"/>
-                                      </p:to>
-                                    </p:set>
-                                  </p:childTnLst>
-                                </p:cTn>
-                              </p:par>
-                            </p:childTnLst>
-                          </p:cTn>
-                        </p:par>
-                      </p:childTnLst>
-                    </p:cTn>
-                  </p:par>
-                  <p:par>
-                    <p:cTn id="23" fill="hold">
-                      <p:stCondLst>
-                        <p:cond delay="indefinite"/>
-                      </p:stCondLst>
-                      <p:childTnLst>
-                        <p:par>
-                          <p:cTn id="24" fill="hold">
-                            <p:stCondLst>
-                              <p:cond delay="0"/>
-                            </p:stCondLst>
-                            <p:childTnLst>
-                              <p:par>
-                                <p:cTn id="25" presetID="1" presetClass="entr" presetSubtype="0" fill="hold" grpId="0" nodeType="clickEffect">
-                                  <p:stCondLst>
-                                    <p:cond delay="0"/>
-                                  </p:stCondLst>
-                                  <p:childTnLst>
-                                    <p:set>
-                                      <p:cBhvr>
-                                        <p:cTn id="26" dur="1" fill="hold">
-                                          <p:stCondLst>
-                                            <p:cond delay="0"/>
-                                          </p:stCondLst>
-                                        </p:cTn>
-                                        <p:tgtEl>
-                                          <p:spTgt spid="3">
-                                            <p:txEl>
-                                              <p:pRg st="5" end="5"/>
-                                            </p:txEl>
-                                          </p:spTgt>
-                                        </p:tgtEl>
-                                        <p:attrNameLst>
-                                          <p:attrName>style.visibility</p:attrName>
-                                        </p:attrNameLst>
-                                      </p:cBhvr>
-                                      <p:to>
-                                        <p:strVal val="visible"/>
-                                      </p:to>
-                                    </p:set>
-                                  </p:childTnLst>
-                                </p:cTn>
-                              </p:par>
-                            </p:childTnLst>
-                          </p:cTn>
-                        </p:par>
-                      </p:childTnLst>
-                    </p:cTn>
-                  </p:par>
-                  <p:par>
-                    <p:cTn id="27" fill="hold">
-                      <p:stCondLst>
-                        <p:cond delay="indefinite"/>
-                      </p:stCondLst>
-                      <p:childTnLst>
-                        <p:par>
-                          <p:cTn id="28" fill="hold">
-                            <p:stCondLst>
-                              <p:cond delay="0"/>
-                            </p:stCondLst>
-                            <p:childTnLst>
-                              <p:par>
-                                <p:cTn id="29" presetID="1" presetClass="entr" presetSubtype="0" fill="hold" grpId="0" nodeType="clickEffect">
-                                  <p:stCondLst>
-                                    <p:cond delay="0"/>
-                                  </p:stCondLst>
-                                  <p:childTnLst>
-                                    <p:set>
-                                      <p:cBhvr>
-                                        <p:cTn id="30" dur="1" fill="hold">
-                                          <p:stCondLst>
-                                            <p:cond delay="0"/>
-                                          </p:stCondLst>
-                                        </p:cTn>
-                                        <p:tgtEl>
-                                          <p:spTgt spid="3">
-                                            <p:txEl>
-                                              <p:pRg st="6" end="6"/>
-                                            </p:txEl>
-                                          </p:spTgt>
-                                        </p:tgtEl>
-                                        <p:attrNameLst>
-                                          <p:attrName>style.visibility</p:attrName>
-                                        </p:attrNameLst>
-                                      </p:cBhvr>
-                                      <p:to>
-                                        <p:strVal val="visible"/>
-                                      </p:to>
-                                    </p:set>
-                                  </p:childTnLst>
-                                </p:cTn>
-                              </p:par>
-                            </p:childTnLst>
-                          </p:cTn>
-                        </p:par>
-                      </p:childTnLst>
-                    </p:cTn>
-                  </p:par>
-                </p:childTnLst>
-              </p:cTn>
-              <p:prevCondLst>
-                <p:cond evt="onPrev" delay="0">
-                  <p:tgtEl>
-                    <p:sldTgt/>
-                  </p:tgtEl>
-                </p:cond>
-              </p:prevCondLst>
-              <p:nextCondLst>
-                <p:cond evt="onNext" delay="0">
-                  <p:tgtEl>
-                    <p:sldTgt/>
-                  </p:tgtEl>
-                </p:cond>
-              </p:nextCondLst>
-            </p:seq>
-          </p:childTnLst>
-        </p:cTn>
-      </p:par>
-    </p:tnLst>
-    <p:bldLst>
-      <p:bldP spid="3" grpId="0" uiExpand="1" build="p"/>
-    </p:bldLst>
-  </p:timing>
 </p:sld>
 </file>
 
